--- a/docs/ieee/pm-method-ieee-resumen-light.pptx
+++ b/docs/ieee/pm-method-ieee-resumen-light.pptx
@@ -1203,7 +1203,7 @@
                   <a:srgbClr val="696969"/>
                 </a:solidFill>
               </a:rPr>
-              <a:t>pm-method 2.4.0 · Resumen light para IEEE · propuesta ajustable</a:t>
+              <a:t>pm-method 2.5.0 · Resumen light para IEEE · propuesta ajustable</a:t>
             </a:r>
             <a:endParaRPr lang="en-US" sz="900" dirty="0"/>
           </a:p>
@@ -2038,7 +2038,7 @@
                   <a:srgbClr val="9FD0F0"/>
                 </a:solidFill>
               </a:rPr>
-              <a:t>pm-method 2.4.0 · propuesta ajustable</a:t>
+              <a:t>pm-method 2.5.0 · propuesta ajustable</a:t>
             </a:r>
             <a:endParaRPr lang="en-US" sz="1100" dirty="0"/>
           </a:p>

--- a/docs/ieee/pm-method-ieee-resumen-light.pptx
+++ b/docs/ieee/pm-method-ieee-resumen-light.pptx
@@ -594,7 +594,7 @@
           <a:p>
             <a:r>
               <a:rPr lang="en-US" dirty="0"/>
-              <a:t>Hoy cualquiera puede pedirle a una IA un plan de proyecto, pero ese plan queda suelto: no se sabe si alguien lo aprobó ni si sigue vigente. pm-method agrega lo que falta: etapas, decisiones explícitas de una persona y controles que corren solos. Conviene leer cada fila de izquierda a derecha: problema y respuesta.</a:t>
+              <a:t>Hoy cualquiera puede pedirle a una IA un plan de proyecto, pero ese plan queda suelto: no se sabe si alguien lo aprobó ni si sigue vigente. pm-method agrega lo que falta: etapas, decisiones explícitas de una persona y controles que corren solos. Conviene leer cada fila de izquierda a derecha: problema y respuesta. La última fila trata las decisiones: antes de elegir entre alternativas, el sistema reúne la evidencia y compara las opciones con criterios explícitos; y, si se instala el buscador opcional, cualquier pregunta sobre el proyecto se responde citando el documento de donde sale.</a:t>
             </a:r>
             <a:endParaRPr lang="en-US" dirty="0"/>
           </a:p>
@@ -1203,7 +1203,7 @@
                   <a:srgbClr val="696969"/>
                 </a:solidFill>
               </a:rPr>
-              <a:t>pm-method 2.5.0 · Resumen light para IEEE · propuesta ajustable</a:t>
+              <a:t>pm-method 2.6.0 · Resumen light para IEEE · propuesta ajustable</a:t>
             </a:r>
             <a:endParaRPr lang="en-US" sz="900" dirty="0"/>
           </a:p>
@@ -2038,7 +2038,7 @@
                   <a:srgbClr val="9FD0F0"/>
                 </a:solidFill>
               </a:rPr>
-              <a:t>pm-method 2.5.0 · propuesta ajustable</a:t>
+              <a:t>pm-method 2.6.0 · propuesta ajustable</a:t>
             </a:r>
             <a:endParaRPr lang="en-US" sz="1100" dirty="0"/>
           </a:p>
@@ -2188,11 +2188,11 @@
         <p:spPr>
           <a:xfrm>
             <a:off x="457200" y="1627632"/>
-            <a:ext cx="5120640" cy="786384"/>
+            <a:ext cx="5120640" cy="676656"/>
           </a:xfrm>
           <a:prstGeom prst="roundRect">
             <a:avLst>
-              <a:gd name="adj" fmla="val 9302"/>
+              <a:gd name="adj" fmla="val 10811"/>
             </a:avLst>
           </a:prstGeom>
           <a:solidFill>
@@ -2215,7 +2215,7 @@
         <p:spPr>
           <a:xfrm>
             <a:off x="640080" y="1700784"/>
-            <a:ext cx="4754880" cy="640080"/>
+            <a:ext cx="4754880" cy="530352"/>
           </a:xfrm>
           <a:prstGeom prst="rect">
             <a:avLst/>
@@ -2251,7 +2251,7 @@
         <p:spPr>
           <a:xfrm>
             <a:off x="5623560" y="1627632"/>
-            <a:ext cx="502920" cy="786384"/>
+            <a:ext cx="502920" cy="676656"/>
           </a:xfrm>
           <a:prstGeom prst="rect">
             <a:avLst/>
@@ -2287,11 +2287,11 @@
         <p:spPr>
           <a:xfrm>
             <a:off x="6172200" y="1627632"/>
-            <a:ext cx="5559552" cy="786384"/>
+            <a:ext cx="5559552" cy="676656"/>
           </a:xfrm>
           <a:prstGeom prst="roundRect">
             <a:avLst>
-              <a:gd name="adj" fmla="val 9302"/>
+              <a:gd name="adj" fmla="val 10811"/>
             </a:avLst>
           </a:prstGeom>
           <a:solidFill>
@@ -2314,7 +2314,7 @@
         <p:spPr>
           <a:xfrm>
             <a:off x="6355080" y="1700784"/>
-            <a:ext cx="5212080" cy="640080"/>
+            <a:ext cx="5212080" cy="530352"/>
           </a:xfrm>
           <a:prstGeom prst="rect">
             <a:avLst/>
@@ -2349,12 +2349,12 @@
         </p:nvSpPr>
         <p:spPr>
           <a:xfrm>
-            <a:off x="457200" y="2542032"/>
-            <a:ext cx="5120640" cy="786384"/>
+            <a:off x="457200" y="2395728"/>
+            <a:ext cx="5120640" cy="676656"/>
           </a:xfrm>
           <a:prstGeom prst="roundRect">
             <a:avLst>
-              <a:gd name="adj" fmla="val 9302"/>
+              <a:gd name="adj" fmla="val 10811"/>
             </a:avLst>
           </a:prstGeom>
           <a:solidFill>
@@ -2376,8 +2376,8 @@
         </p:nvSpPr>
         <p:spPr>
           <a:xfrm>
-            <a:off x="640080" y="2615184"/>
-            <a:ext cx="4754880" cy="640080"/>
+            <a:off x="640080" y="2468880"/>
+            <a:ext cx="4754880" cy="530352"/>
           </a:xfrm>
           <a:prstGeom prst="rect">
             <a:avLst/>
@@ -2412,8 +2412,8 @@
         </p:nvSpPr>
         <p:spPr>
           <a:xfrm>
-            <a:off x="5623560" y="2542032"/>
-            <a:ext cx="502920" cy="786384"/>
+            <a:off x="5623560" y="2395728"/>
+            <a:ext cx="502920" cy="676656"/>
           </a:xfrm>
           <a:prstGeom prst="rect">
             <a:avLst/>
@@ -2448,12 +2448,12 @@
         </p:nvSpPr>
         <p:spPr>
           <a:xfrm>
-            <a:off x="6172200" y="2542032"/>
-            <a:ext cx="5559552" cy="786384"/>
+            <a:off x="6172200" y="2395728"/>
+            <a:ext cx="5559552" cy="676656"/>
           </a:xfrm>
           <a:prstGeom prst="roundRect">
             <a:avLst>
-              <a:gd name="adj" fmla="val 9302"/>
+              <a:gd name="adj" fmla="val 10811"/>
             </a:avLst>
           </a:prstGeom>
           <a:solidFill>
@@ -2475,8 +2475,8 @@
         </p:nvSpPr>
         <p:spPr>
           <a:xfrm>
-            <a:off x="6355080" y="2615184"/>
-            <a:ext cx="5212080" cy="640080"/>
+            <a:off x="6355080" y="2468880"/>
+            <a:ext cx="5212080" cy="530352"/>
           </a:xfrm>
           <a:prstGeom prst="rect">
             <a:avLst/>
@@ -2511,12 +2511,12 @@
         </p:nvSpPr>
         <p:spPr>
           <a:xfrm>
-            <a:off x="457200" y="3456432"/>
-            <a:ext cx="5120640" cy="786384"/>
+            <a:off x="457200" y="3163824"/>
+            <a:ext cx="5120640" cy="676656"/>
           </a:xfrm>
           <a:prstGeom prst="roundRect">
             <a:avLst>
-              <a:gd name="adj" fmla="val 9302"/>
+              <a:gd name="adj" fmla="val 10811"/>
             </a:avLst>
           </a:prstGeom>
           <a:solidFill>
@@ -2538,8 +2538,8 @@
         </p:nvSpPr>
         <p:spPr>
           <a:xfrm>
-            <a:off x="640080" y="3529584"/>
-            <a:ext cx="4754880" cy="640080"/>
+            <a:off x="640080" y="3236976"/>
+            <a:ext cx="4754880" cy="530352"/>
           </a:xfrm>
           <a:prstGeom prst="rect">
             <a:avLst/>
@@ -2574,8 +2574,8 @@
         </p:nvSpPr>
         <p:spPr>
           <a:xfrm>
-            <a:off x="5623560" y="3456432"/>
-            <a:ext cx="502920" cy="786384"/>
+            <a:off x="5623560" y="3163824"/>
+            <a:ext cx="502920" cy="676656"/>
           </a:xfrm>
           <a:prstGeom prst="rect">
             <a:avLst/>
@@ -2610,12 +2610,12 @@
         </p:nvSpPr>
         <p:spPr>
           <a:xfrm>
-            <a:off x="6172200" y="3456432"/>
-            <a:ext cx="5559552" cy="786384"/>
+            <a:off x="6172200" y="3163824"/>
+            <a:ext cx="5559552" cy="676656"/>
           </a:xfrm>
           <a:prstGeom prst="roundRect">
             <a:avLst>
-              <a:gd name="adj" fmla="val 9302"/>
+              <a:gd name="adj" fmla="val 10811"/>
             </a:avLst>
           </a:prstGeom>
           <a:solidFill>
@@ -2637,8 +2637,8 @@
         </p:nvSpPr>
         <p:spPr>
           <a:xfrm>
-            <a:off x="6355080" y="3529584"/>
-            <a:ext cx="5212080" cy="640080"/>
+            <a:off x="6355080" y="3236976"/>
+            <a:ext cx="5212080" cy="530352"/>
           </a:xfrm>
           <a:prstGeom prst="rect">
             <a:avLst/>
@@ -2673,12 +2673,12 @@
         </p:nvSpPr>
         <p:spPr>
           <a:xfrm>
-            <a:off x="457200" y="4370832"/>
-            <a:ext cx="5120640" cy="786384"/>
+            <a:off x="457200" y="3931920"/>
+            <a:ext cx="5120640" cy="676656"/>
           </a:xfrm>
           <a:prstGeom prst="roundRect">
             <a:avLst>
-              <a:gd name="adj" fmla="val 9302"/>
+              <a:gd name="adj" fmla="val 10811"/>
             </a:avLst>
           </a:prstGeom>
           <a:solidFill>
@@ -2700,8 +2700,8 @@
         </p:nvSpPr>
         <p:spPr>
           <a:xfrm>
-            <a:off x="640080" y="4443984"/>
-            <a:ext cx="4754880" cy="640080"/>
+            <a:off x="640080" y="4005072"/>
+            <a:ext cx="4754880" cy="530352"/>
           </a:xfrm>
           <a:prstGeom prst="rect">
             <a:avLst/>
@@ -2736,8 +2736,8 @@
         </p:nvSpPr>
         <p:spPr>
           <a:xfrm>
-            <a:off x="5623560" y="4370832"/>
-            <a:ext cx="502920" cy="786384"/>
+            <a:off x="5623560" y="3931920"/>
+            <a:ext cx="502920" cy="676656"/>
           </a:xfrm>
           <a:prstGeom prst="rect">
             <a:avLst/>
@@ -2772,12 +2772,12 @@
         </p:nvSpPr>
         <p:spPr>
           <a:xfrm>
-            <a:off x="6172200" y="4370832"/>
-            <a:ext cx="5559552" cy="786384"/>
+            <a:off x="6172200" y="3931920"/>
+            <a:ext cx="5559552" cy="676656"/>
           </a:xfrm>
           <a:prstGeom prst="roundRect">
             <a:avLst>
-              <a:gd name="adj" fmla="val 9302"/>
+              <a:gd name="adj" fmla="val 10811"/>
             </a:avLst>
           </a:prstGeom>
           <a:solidFill>
@@ -2799,8 +2799,8 @@
         </p:nvSpPr>
         <p:spPr>
           <a:xfrm>
-            <a:off x="6355080" y="4443984"/>
-            <a:ext cx="5212080" cy="640080"/>
+            <a:off x="6355080" y="4005072"/>
+            <a:ext cx="5212080" cy="530352"/>
           </a:xfrm>
           <a:prstGeom prst="rect">
             <a:avLst/>
@@ -2835,7 +2835,169 @@
         </p:nvSpPr>
         <p:spPr>
           <a:xfrm>
-            <a:off x="457200" y="5394960"/>
+            <a:off x="457200" y="4700016"/>
+            <a:ext cx="5120640" cy="676656"/>
+          </a:xfrm>
+          <a:prstGeom prst="roundRect">
+            <a:avLst>
+              <a:gd name="adj" fmla="val 10811"/>
+            </a:avLst>
+          </a:prstGeom>
+          <a:solidFill>
+            <a:srgbClr val="F4F6F8"/>
+          </a:solidFill>
+          <a:ln w="9525">
+            <a:solidFill>
+              <a:srgbClr val="F4F6F8"/>
+            </a:solidFill>
+            <a:prstDash val="solid"/>
+          </a:ln>
+        </p:spPr>
+      </p:sp>
+      <p:sp>
+        <p:nvSpPr>
+          <p:cNvPr id="27" name="Text 24"/>
+          <p:cNvSpPr txBox="1"/>
+          <p:nvPr/>
+        </p:nvSpPr>
+        <p:spPr>
+          <a:xfrm>
+            <a:off x="640080" y="4773168"/>
+            <a:ext cx="4754880" cy="530352"/>
+          </a:xfrm>
+          <a:prstGeom prst="rect">
+            <a:avLst/>
+          </a:prstGeom>
+          <a:noFill/>
+          <a:ln/>
+        </p:spPr>
+        <p:txBody>
+          <a:bodyPr wrap="square" lIns="0" tIns="0" rIns="0" bIns="0" rtlCol="0" anchor="ctr"/>
+          <a:lstStyle/>
+          <a:p>
+            <a:pPr indent="0" marL="0">
+              <a:buNone/>
+            </a:pPr>
+            <a:r>
+              <a:rPr lang="en-US" sz="1600" dirty="0">
+                <a:solidFill>
+                  <a:srgbClr val="272425"/>
+                </a:solidFill>
+              </a:rPr>
+              <a:t>Se decide a ojo y después nadie encuentra en qué se basó la decisión</a:t>
+            </a:r>
+            <a:endParaRPr lang="en-US" sz="1600" dirty="0"/>
+          </a:p>
+        </p:txBody>
+      </p:sp>
+      <p:sp>
+        <p:nvSpPr>
+          <p:cNvPr id="28" name="Text 25"/>
+          <p:cNvSpPr txBox="1"/>
+          <p:nvPr/>
+        </p:nvSpPr>
+        <p:spPr>
+          <a:xfrm>
+            <a:off x="5623560" y="4700016"/>
+            <a:ext cx="502920" cy="676656"/>
+          </a:xfrm>
+          <a:prstGeom prst="rect">
+            <a:avLst/>
+          </a:prstGeom>
+          <a:noFill/>
+          <a:ln/>
+        </p:spPr>
+        <p:txBody>
+          <a:bodyPr wrap="square" lIns="0" tIns="0" rIns="0" bIns="0" rtlCol="0" anchor="ctr"/>
+          <a:lstStyle/>
+          <a:p>
+            <a:pPr algn="ctr" indent="0" marL="0">
+              <a:buNone/>
+            </a:pPr>
+            <a:r>
+              <a:rPr lang="en-US" sz="2400" b="1" dirty="0">
+                <a:solidFill>
+                  <a:srgbClr val="B5651D"/>
+                </a:solidFill>
+              </a:rPr>
+              <a:t>→</a:t>
+            </a:r>
+            <a:endParaRPr lang="en-US" sz="2400" dirty="0"/>
+          </a:p>
+        </p:txBody>
+      </p:sp>
+      <p:sp>
+        <p:nvSpPr>
+          <p:cNvPr id="29" name="Shape 26"/>
+          <p:cNvSpPr/>
+          <p:nvPr/>
+        </p:nvSpPr>
+        <p:spPr>
+          <a:xfrm>
+            <a:off x="6172200" y="4700016"/>
+            <a:ext cx="5559552" cy="676656"/>
+          </a:xfrm>
+          <a:prstGeom prst="roundRect">
+            <a:avLst>
+              <a:gd name="adj" fmla="val 10811"/>
+            </a:avLst>
+          </a:prstGeom>
+          <a:solidFill>
+            <a:srgbClr val="E9F1F8"/>
+          </a:solidFill>
+          <a:ln w="9525">
+            <a:solidFill>
+              <a:srgbClr val="E9F1F8"/>
+            </a:solidFill>
+            <a:prstDash val="solid"/>
+          </a:ln>
+        </p:spPr>
+      </p:sp>
+      <p:sp>
+        <p:nvSpPr>
+          <p:cNvPr id="30" name="Text 27"/>
+          <p:cNvSpPr txBox="1"/>
+          <p:nvPr/>
+        </p:nvSpPr>
+        <p:spPr>
+          <a:xfrm>
+            <a:off x="6355080" y="4773168"/>
+            <a:ext cx="5212080" cy="530352"/>
+          </a:xfrm>
+          <a:prstGeom prst="rect">
+            <a:avLst/>
+          </a:prstGeom>
+          <a:noFill/>
+          <a:ln/>
+        </p:spPr>
+        <p:txBody>
+          <a:bodyPr wrap="square" lIns="0" tIns="0" rIns="0" bIns="0" rtlCol="0" anchor="ctr"/>
+          <a:lstStyle/>
+          <a:p>
+            <a:pPr indent="0" marL="0">
+              <a:buNone/>
+            </a:pPr>
+            <a:r>
+              <a:rPr lang="en-US" sz="1400" b="1" dirty="0">
+                <a:solidFill>
+                  <a:srgbClr val="17324D"/>
+                </a:solidFill>
+              </a:rPr>
+              <a:t>Cada decisión, con su evidencia y sus opciones comparadas; y búsqueda en el proyecto con la fuente citada</a:t>
+            </a:r>
+            <a:endParaRPr lang="en-US" sz="1400" dirty="0"/>
+          </a:p>
+        </p:txBody>
+      </p:sp>
+      <p:sp>
+        <p:nvSpPr>
+          <p:cNvPr id="31" name="Shape 28"/>
+          <p:cNvSpPr/>
+          <p:nvPr/>
+        </p:nvSpPr>
+        <p:spPr>
+          <a:xfrm>
+            <a:off x="457200" y="5577840"/>
             <a:ext cx="11274552" cy="603504"/>
           </a:xfrm>
           <a:prstGeom prst="roundRect">
@@ -2856,13 +3018,13 @@
       </p:sp>
       <p:sp>
         <p:nvSpPr>
-          <p:cNvPr id="27" name="Text 24"/>
-          <p:cNvSpPr txBox="1"/>
-          <p:nvPr/>
-        </p:nvSpPr>
-        <p:spPr>
-          <a:xfrm>
-            <a:off x="685800" y="5394960"/>
+          <p:cNvPr id="32" name="Text 29"/>
+          <p:cNvSpPr txBox="1"/>
+          <p:nvPr/>
+        </p:nvSpPr>
+        <p:spPr>
+          <a:xfrm>
+            <a:off x="685800" y="5577840"/>
             <a:ext cx="10881360" cy="603504"/>
           </a:xfrm>
           <a:prstGeom prst="rect">
